--- a/docs/VANI_Status_Slide.pptx
+++ b/docs/VANI_Status_Slide.pptx
@@ -5,9 +5,9 @@
     <p:sldMasterId id="2147483648" r:id="rId1"/>
   </p:sldMasterIdLst>
   <p:sldIdLst>
-    <p:sldId id="256" r:id="rId7"/>
+    <p:sldId id="256" r:id="rId2"/>
   </p:sldIdLst>
-  <p:sldSz cx="12191695" cy="6858000" type="screen4x3"/>
+  <p:sldSz cx="12192000" cy="6858000"/>
   <p:notesSz cx="6858000" cy="9144000"/>
   <p:defaultTextStyle>
     <a:defPPr>
@@ -104,6 +104,22 @@
       </a:defRPr>
     </a:lvl9pPr>
   </p:defaultTextStyle>
+  <p:extLst>
+    <p:ext uri="{EFAFB233-063F-42B5-8137-9DF3F51BA10A}">
+      <p15:sldGuideLst xmlns:p15="http://schemas.microsoft.com/office/powerpoint/2012/main">
+        <p15:guide id="1" orient="horz" pos="2160">
+          <p15:clr>
+            <a:srgbClr val="A4A3A4"/>
+          </p15:clr>
+        </p15:guide>
+        <p15:guide id="2" pos="2880">
+          <p15:clr>
+            <a:srgbClr val="A4A3A4"/>
+          </p15:clr>
+        </p15:guide>
+      </p15:sldGuideLst>
+    </p:ext>
+  </p:extLst>
 </p:presentation>
 </file>
 
@@ -145,10 +161,9 @@
           <a:lstStyle/>
           <a:p>
             <a:r>
-              <a:rPr lang="en-US" smtClean="0"/>
+              <a:rPr lang="en-US"/>
               <a:t>Click to edit Master title style</a:t>
             </a:r>
-            <a:endParaRPr lang="en-US"/>
           </a:p>
         </p:txBody>
       </p:sp>
@@ -264,10 +279,9 @@
           </a:lstStyle>
           <a:p>
             <a:r>
-              <a:rPr lang="en-US" smtClean="0"/>
+              <a:rPr lang="en-US"/>
               <a:t>Click to edit Master subtitle style</a:t>
             </a:r>
-            <a:endParaRPr lang="en-US"/>
           </a:p>
         </p:txBody>
       </p:sp>
@@ -288,7 +302,7 @@
           <a:p>
             <a:fld id="{5BCAD085-E8A6-8845-BD4E-CB4CCA059FC4}" type="datetimeFigureOut">
               <a:rPr lang="en-US" smtClean="0"/>
-              <a:t>1/27/13</a:t>
+              <a:t>7/7/2026</a:t>
             </a:fld>
             <a:endParaRPr lang="en-US"/>
           </a:p>
@@ -382,10 +396,9 @@
           <a:lstStyle/>
           <a:p>
             <a:r>
-              <a:rPr lang="en-US" smtClean="0"/>
+              <a:rPr lang="en-US"/>
               <a:t>Click to edit Master title style</a:t>
             </a:r>
-            <a:endParaRPr lang="en-US"/>
           </a:p>
         </p:txBody>
       </p:sp>
@@ -406,38 +419,37 @@
           <a:p>
             <a:pPr lvl="0"/>
             <a:r>
-              <a:rPr lang="en-US" smtClean="0"/>
+              <a:rPr lang="en-US"/>
               <a:t>Click to edit Master text styles</a:t>
             </a:r>
           </a:p>
           <a:p>
             <a:pPr lvl="1"/>
             <a:r>
-              <a:rPr lang="en-US" smtClean="0"/>
+              <a:rPr lang="en-US"/>
               <a:t>Second level</a:t>
             </a:r>
           </a:p>
           <a:p>
             <a:pPr lvl="2"/>
             <a:r>
-              <a:rPr lang="en-US" smtClean="0"/>
+              <a:rPr lang="en-US"/>
               <a:t>Third level</a:t>
             </a:r>
           </a:p>
           <a:p>
             <a:pPr lvl="3"/>
             <a:r>
-              <a:rPr lang="en-US" smtClean="0"/>
+              <a:rPr lang="en-US"/>
               <a:t>Fourth level</a:t>
             </a:r>
           </a:p>
           <a:p>
             <a:pPr lvl="4"/>
             <a:r>
-              <a:rPr lang="en-US" smtClean="0"/>
+              <a:rPr lang="en-US"/>
               <a:t>Fifth level</a:t>
             </a:r>
-            <a:endParaRPr lang="en-US"/>
           </a:p>
         </p:txBody>
       </p:sp>
@@ -458,7 +470,7 @@
           <a:p>
             <a:fld id="{5BCAD085-E8A6-8845-BD4E-CB4CCA059FC4}" type="datetimeFigureOut">
               <a:rPr lang="en-US" smtClean="0"/>
-              <a:t>1/27/13</a:t>
+              <a:t>7/7/2026</a:t>
             </a:fld>
             <a:endParaRPr lang="en-US"/>
           </a:p>
@@ -557,10 +569,9 @@
           <a:lstStyle/>
           <a:p>
             <a:r>
-              <a:rPr lang="en-US" smtClean="0"/>
+              <a:rPr lang="en-US"/>
               <a:t>Click to edit Master title style</a:t>
             </a:r>
-            <a:endParaRPr lang="en-US"/>
           </a:p>
         </p:txBody>
       </p:sp>
@@ -586,38 +597,37 @@
           <a:p>
             <a:pPr lvl="0"/>
             <a:r>
-              <a:rPr lang="en-US" smtClean="0"/>
+              <a:rPr lang="en-US"/>
               <a:t>Click to edit Master text styles</a:t>
             </a:r>
           </a:p>
           <a:p>
             <a:pPr lvl="1"/>
             <a:r>
-              <a:rPr lang="en-US" smtClean="0"/>
+              <a:rPr lang="en-US"/>
               <a:t>Second level</a:t>
             </a:r>
           </a:p>
           <a:p>
             <a:pPr lvl="2"/>
             <a:r>
-              <a:rPr lang="en-US" smtClean="0"/>
+              <a:rPr lang="en-US"/>
               <a:t>Third level</a:t>
             </a:r>
           </a:p>
           <a:p>
             <a:pPr lvl="3"/>
             <a:r>
-              <a:rPr lang="en-US" smtClean="0"/>
+              <a:rPr lang="en-US"/>
               <a:t>Fourth level</a:t>
             </a:r>
           </a:p>
           <a:p>
             <a:pPr lvl="4"/>
             <a:r>
-              <a:rPr lang="en-US" smtClean="0"/>
+              <a:rPr lang="en-US"/>
               <a:t>Fifth level</a:t>
             </a:r>
-            <a:endParaRPr lang="en-US"/>
           </a:p>
         </p:txBody>
       </p:sp>
@@ -638,7 +648,7 @@
           <a:p>
             <a:fld id="{5BCAD085-E8A6-8845-BD4E-CB4CCA059FC4}" type="datetimeFigureOut">
               <a:rPr lang="en-US" smtClean="0"/>
-              <a:t>1/27/13</a:t>
+              <a:t>7/7/2026</a:t>
             </a:fld>
             <a:endParaRPr lang="en-US"/>
           </a:p>
@@ -732,10 +742,9 @@
           <a:lstStyle/>
           <a:p>
             <a:r>
-              <a:rPr lang="en-US" smtClean="0"/>
+              <a:rPr lang="en-US"/>
               <a:t>Click to edit Master title style</a:t>
             </a:r>
-            <a:endParaRPr lang="en-US"/>
           </a:p>
         </p:txBody>
       </p:sp>
@@ -756,38 +765,37 @@
           <a:p>
             <a:pPr lvl="0"/>
             <a:r>
-              <a:rPr lang="en-US" smtClean="0"/>
+              <a:rPr lang="en-US"/>
               <a:t>Click to edit Master text styles</a:t>
             </a:r>
           </a:p>
           <a:p>
             <a:pPr lvl="1"/>
             <a:r>
-              <a:rPr lang="en-US" smtClean="0"/>
+              <a:rPr lang="en-US"/>
               <a:t>Second level</a:t>
             </a:r>
           </a:p>
           <a:p>
             <a:pPr lvl="2"/>
             <a:r>
-              <a:rPr lang="en-US" smtClean="0"/>
+              <a:rPr lang="en-US"/>
               <a:t>Third level</a:t>
             </a:r>
           </a:p>
           <a:p>
             <a:pPr lvl="3"/>
             <a:r>
-              <a:rPr lang="en-US" smtClean="0"/>
+              <a:rPr lang="en-US"/>
               <a:t>Fourth level</a:t>
             </a:r>
           </a:p>
           <a:p>
             <a:pPr lvl="4"/>
             <a:r>
-              <a:rPr lang="en-US" smtClean="0"/>
+              <a:rPr lang="en-US"/>
               <a:t>Fifth level</a:t>
             </a:r>
-            <a:endParaRPr lang="en-US"/>
           </a:p>
         </p:txBody>
       </p:sp>
@@ -808,7 +816,7 @@
           <a:p>
             <a:fld id="{5BCAD085-E8A6-8845-BD4E-CB4CCA059FC4}" type="datetimeFigureOut">
               <a:rPr lang="en-US" smtClean="0"/>
-              <a:t>1/27/13</a:t>
+              <a:t>7/7/2026</a:t>
             </a:fld>
             <a:endParaRPr lang="en-US"/>
           </a:p>
@@ -911,10 +919,9 @@
           </a:lstStyle>
           <a:p>
             <a:r>
-              <a:rPr lang="en-US" smtClean="0"/>
+              <a:rPr lang="en-US"/>
               <a:t>Click to edit Master title style</a:t>
             </a:r>
-            <a:endParaRPr lang="en-US"/>
           </a:p>
         </p:txBody>
       </p:sp>
@@ -1031,7 +1038,7 @@
           <a:p>
             <a:pPr lvl="0"/>
             <a:r>
-              <a:rPr lang="en-US" smtClean="0"/>
+              <a:rPr lang="en-US"/>
               <a:t>Click to edit Master text styles</a:t>
             </a:r>
           </a:p>
@@ -1054,7 +1061,7 @@
           <a:p>
             <a:fld id="{5BCAD085-E8A6-8845-BD4E-CB4CCA059FC4}" type="datetimeFigureOut">
               <a:rPr lang="en-US" smtClean="0"/>
-              <a:t>1/27/13</a:t>
+              <a:t>7/7/2026</a:t>
             </a:fld>
             <a:endParaRPr lang="en-US"/>
           </a:p>
@@ -1148,10 +1155,9 @@
           <a:lstStyle/>
           <a:p>
             <a:r>
-              <a:rPr lang="en-US" smtClean="0"/>
+              <a:rPr lang="en-US"/>
               <a:t>Click to edit Master title style</a:t>
             </a:r>
-            <a:endParaRPr lang="en-US"/>
           </a:p>
         </p:txBody>
       </p:sp>
@@ -1205,38 +1211,37 @@
           <a:p>
             <a:pPr lvl="0"/>
             <a:r>
-              <a:rPr lang="en-US" smtClean="0"/>
+              <a:rPr lang="en-US"/>
               <a:t>Click to edit Master text styles</a:t>
             </a:r>
           </a:p>
           <a:p>
             <a:pPr lvl="1"/>
             <a:r>
-              <a:rPr lang="en-US" smtClean="0"/>
+              <a:rPr lang="en-US"/>
               <a:t>Second level</a:t>
             </a:r>
           </a:p>
           <a:p>
             <a:pPr lvl="2"/>
             <a:r>
-              <a:rPr lang="en-US" smtClean="0"/>
+              <a:rPr lang="en-US"/>
               <a:t>Third level</a:t>
             </a:r>
           </a:p>
           <a:p>
             <a:pPr lvl="3"/>
             <a:r>
-              <a:rPr lang="en-US" smtClean="0"/>
+              <a:rPr lang="en-US"/>
               <a:t>Fourth level</a:t>
             </a:r>
           </a:p>
           <a:p>
             <a:pPr lvl="4"/>
             <a:r>
-              <a:rPr lang="en-US" smtClean="0"/>
+              <a:rPr lang="en-US"/>
               <a:t>Fifth level</a:t>
             </a:r>
-            <a:endParaRPr lang="en-US"/>
           </a:p>
         </p:txBody>
       </p:sp>
@@ -1290,38 +1295,37 @@
           <a:p>
             <a:pPr lvl="0"/>
             <a:r>
-              <a:rPr lang="en-US" smtClean="0"/>
+              <a:rPr lang="en-US"/>
               <a:t>Click to edit Master text styles</a:t>
             </a:r>
           </a:p>
           <a:p>
             <a:pPr lvl="1"/>
             <a:r>
-              <a:rPr lang="en-US" smtClean="0"/>
+              <a:rPr lang="en-US"/>
               <a:t>Second level</a:t>
             </a:r>
           </a:p>
           <a:p>
             <a:pPr lvl="2"/>
             <a:r>
-              <a:rPr lang="en-US" smtClean="0"/>
+              <a:rPr lang="en-US"/>
               <a:t>Third level</a:t>
             </a:r>
           </a:p>
           <a:p>
             <a:pPr lvl="3"/>
             <a:r>
-              <a:rPr lang="en-US" smtClean="0"/>
+              <a:rPr lang="en-US"/>
               <a:t>Fourth level</a:t>
             </a:r>
           </a:p>
           <a:p>
             <a:pPr lvl="4"/>
             <a:r>
-              <a:rPr lang="en-US" smtClean="0"/>
+              <a:rPr lang="en-US"/>
               <a:t>Fifth level</a:t>
             </a:r>
-            <a:endParaRPr lang="en-US"/>
           </a:p>
         </p:txBody>
       </p:sp>
@@ -1342,7 +1346,7 @@
           <a:p>
             <a:fld id="{5BCAD085-E8A6-8845-BD4E-CB4CCA059FC4}" type="datetimeFigureOut">
               <a:rPr lang="en-US" smtClean="0"/>
-              <a:t>1/27/13</a:t>
+              <a:t>7/7/2026</a:t>
             </a:fld>
             <a:endParaRPr lang="en-US"/>
           </a:p>
@@ -1440,10 +1444,9 @@
           </a:lstStyle>
           <a:p>
             <a:r>
-              <a:rPr lang="en-US" smtClean="0"/>
+              <a:rPr lang="en-US"/>
               <a:t>Click to edit Master title style</a:t>
             </a:r>
-            <a:endParaRPr lang="en-US"/>
           </a:p>
         </p:txBody>
       </p:sp>
@@ -1506,7 +1509,7 @@
           <a:p>
             <a:pPr lvl="0"/>
             <a:r>
-              <a:rPr lang="en-US" smtClean="0"/>
+              <a:rPr lang="en-US"/>
               <a:t>Click to edit Master text styles</a:t>
             </a:r>
           </a:p>
@@ -1562,38 +1565,37 @@
           <a:p>
             <a:pPr lvl="0"/>
             <a:r>
-              <a:rPr lang="en-US" smtClean="0"/>
+              <a:rPr lang="en-US"/>
               <a:t>Click to edit Master text styles</a:t>
             </a:r>
           </a:p>
           <a:p>
             <a:pPr lvl="1"/>
             <a:r>
-              <a:rPr lang="en-US" smtClean="0"/>
+              <a:rPr lang="en-US"/>
               <a:t>Second level</a:t>
             </a:r>
           </a:p>
           <a:p>
             <a:pPr lvl="2"/>
             <a:r>
-              <a:rPr lang="en-US" smtClean="0"/>
+              <a:rPr lang="en-US"/>
               <a:t>Third level</a:t>
             </a:r>
           </a:p>
           <a:p>
             <a:pPr lvl="3"/>
             <a:r>
-              <a:rPr lang="en-US" smtClean="0"/>
+              <a:rPr lang="en-US"/>
               <a:t>Fourth level</a:t>
             </a:r>
           </a:p>
           <a:p>
             <a:pPr lvl="4"/>
             <a:r>
-              <a:rPr lang="en-US" smtClean="0"/>
+              <a:rPr lang="en-US"/>
               <a:t>Fifth level</a:t>
             </a:r>
-            <a:endParaRPr lang="en-US"/>
           </a:p>
         </p:txBody>
       </p:sp>
@@ -1656,7 +1658,7 @@
           <a:p>
             <a:pPr lvl="0"/>
             <a:r>
-              <a:rPr lang="en-US" smtClean="0"/>
+              <a:rPr lang="en-US"/>
               <a:t>Click to edit Master text styles</a:t>
             </a:r>
           </a:p>
@@ -1712,38 +1714,37 @@
           <a:p>
             <a:pPr lvl="0"/>
             <a:r>
-              <a:rPr lang="en-US" smtClean="0"/>
+              <a:rPr lang="en-US"/>
               <a:t>Click to edit Master text styles</a:t>
             </a:r>
           </a:p>
           <a:p>
             <a:pPr lvl="1"/>
             <a:r>
-              <a:rPr lang="en-US" smtClean="0"/>
+              <a:rPr lang="en-US"/>
               <a:t>Second level</a:t>
             </a:r>
           </a:p>
           <a:p>
             <a:pPr lvl="2"/>
             <a:r>
-              <a:rPr lang="en-US" smtClean="0"/>
+              <a:rPr lang="en-US"/>
               <a:t>Third level</a:t>
             </a:r>
           </a:p>
           <a:p>
             <a:pPr lvl="3"/>
             <a:r>
-              <a:rPr lang="en-US" smtClean="0"/>
+              <a:rPr lang="en-US"/>
               <a:t>Fourth level</a:t>
             </a:r>
           </a:p>
           <a:p>
             <a:pPr lvl="4"/>
             <a:r>
-              <a:rPr lang="en-US" smtClean="0"/>
+              <a:rPr lang="en-US"/>
               <a:t>Fifth level</a:t>
             </a:r>
-            <a:endParaRPr lang="en-US"/>
           </a:p>
         </p:txBody>
       </p:sp>
@@ -1764,7 +1765,7 @@
           <a:p>
             <a:fld id="{5BCAD085-E8A6-8845-BD4E-CB4CCA059FC4}" type="datetimeFigureOut">
               <a:rPr lang="en-US" smtClean="0"/>
-              <a:t>1/27/13</a:t>
+              <a:t>7/7/2026</a:t>
             </a:fld>
             <a:endParaRPr lang="en-US"/>
           </a:p>
@@ -1858,10 +1859,9 @@
           <a:lstStyle/>
           <a:p>
             <a:r>
-              <a:rPr lang="en-US" smtClean="0"/>
+              <a:rPr lang="en-US"/>
               <a:t>Click to edit Master title style</a:t>
             </a:r>
-            <a:endParaRPr lang="en-US"/>
           </a:p>
         </p:txBody>
       </p:sp>
@@ -1882,7 +1882,7 @@
           <a:p>
             <a:fld id="{5BCAD085-E8A6-8845-BD4E-CB4CCA059FC4}" type="datetimeFigureOut">
               <a:rPr lang="en-US" smtClean="0"/>
-              <a:t>1/27/13</a:t>
+              <a:t>7/7/2026</a:t>
             </a:fld>
             <a:endParaRPr lang="en-US"/>
           </a:p>
@@ -1977,7 +1977,7 @@
           <a:p>
             <a:fld id="{5BCAD085-E8A6-8845-BD4E-CB4CCA059FC4}" type="datetimeFigureOut">
               <a:rPr lang="en-US" smtClean="0"/>
-              <a:t>1/27/13</a:t>
+              <a:t>7/7/2026</a:t>
             </a:fld>
             <a:endParaRPr lang="en-US"/>
           </a:p>
@@ -2080,10 +2080,9 @@
           </a:lstStyle>
           <a:p>
             <a:r>
-              <a:rPr lang="en-US" smtClean="0"/>
+              <a:rPr lang="en-US"/>
               <a:t>Click to edit Master title style</a:t>
             </a:r>
-            <a:endParaRPr lang="en-US"/>
           </a:p>
         </p:txBody>
       </p:sp>
@@ -2137,38 +2136,37 @@
           <a:p>
             <a:pPr lvl="0"/>
             <a:r>
-              <a:rPr lang="en-US" smtClean="0"/>
+              <a:rPr lang="en-US"/>
               <a:t>Click to edit Master text styles</a:t>
             </a:r>
           </a:p>
           <a:p>
             <a:pPr lvl="1"/>
             <a:r>
-              <a:rPr lang="en-US" smtClean="0"/>
+              <a:rPr lang="en-US"/>
               <a:t>Second level</a:t>
             </a:r>
           </a:p>
           <a:p>
             <a:pPr lvl="2"/>
             <a:r>
-              <a:rPr lang="en-US" smtClean="0"/>
+              <a:rPr lang="en-US"/>
               <a:t>Third level</a:t>
             </a:r>
           </a:p>
           <a:p>
             <a:pPr lvl="3"/>
             <a:r>
-              <a:rPr lang="en-US" smtClean="0"/>
+              <a:rPr lang="en-US"/>
               <a:t>Fourth level</a:t>
             </a:r>
           </a:p>
           <a:p>
             <a:pPr lvl="4"/>
             <a:r>
-              <a:rPr lang="en-US" smtClean="0"/>
+              <a:rPr lang="en-US"/>
               <a:t>Fifth level</a:t>
             </a:r>
-            <a:endParaRPr lang="en-US"/>
           </a:p>
         </p:txBody>
       </p:sp>
@@ -2231,7 +2229,7 @@
           <a:p>
             <a:pPr lvl="0"/>
             <a:r>
-              <a:rPr lang="en-US" smtClean="0"/>
+              <a:rPr lang="en-US"/>
               <a:t>Click to edit Master text styles</a:t>
             </a:r>
           </a:p>
@@ -2254,7 +2252,7 @@
           <a:p>
             <a:fld id="{5BCAD085-E8A6-8845-BD4E-CB4CCA059FC4}" type="datetimeFigureOut">
               <a:rPr lang="en-US" smtClean="0"/>
-              <a:t>1/27/13</a:t>
+              <a:t>7/7/2026</a:t>
             </a:fld>
             <a:endParaRPr lang="en-US"/>
           </a:p>
@@ -2357,10 +2355,9 @@
           </a:lstStyle>
           <a:p>
             <a:r>
-              <a:rPr lang="en-US" smtClean="0"/>
+              <a:rPr lang="en-US"/>
               <a:t>Click to edit Master title style</a:t>
             </a:r>
-            <a:endParaRPr lang="en-US"/>
           </a:p>
         </p:txBody>
       </p:sp>
@@ -2484,7 +2481,7 @@
           <a:p>
             <a:pPr lvl="0"/>
             <a:r>
-              <a:rPr lang="en-US" smtClean="0"/>
+              <a:rPr lang="en-US"/>
               <a:t>Click to edit Master text styles</a:t>
             </a:r>
           </a:p>
@@ -2507,7 +2504,7 @@
           <a:p>
             <a:fld id="{5BCAD085-E8A6-8845-BD4E-CB4CCA059FC4}" type="datetimeFigureOut">
               <a:rPr lang="en-US" smtClean="0"/>
-              <a:t>1/27/13</a:t>
+              <a:t>7/7/2026</a:t>
             </a:fld>
             <a:endParaRPr lang="en-US"/>
           </a:p>
@@ -2616,10 +2613,9 @@
           <a:lstStyle/>
           <a:p>
             <a:r>
-              <a:rPr lang="en-US" smtClean="0"/>
+              <a:rPr lang="en-US"/>
               <a:t>Click to edit Master title style</a:t>
             </a:r>
-            <a:endParaRPr lang="en-US"/>
           </a:p>
         </p:txBody>
       </p:sp>
@@ -2650,38 +2646,37 @@
           <a:p>
             <a:pPr lvl="0"/>
             <a:r>
-              <a:rPr lang="en-US" smtClean="0"/>
+              <a:rPr lang="en-US"/>
               <a:t>Click to edit Master text styles</a:t>
             </a:r>
           </a:p>
           <a:p>
             <a:pPr lvl="1"/>
             <a:r>
-              <a:rPr lang="en-US" smtClean="0"/>
+              <a:rPr lang="en-US"/>
               <a:t>Second level</a:t>
             </a:r>
           </a:p>
           <a:p>
             <a:pPr lvl="2"/>
             <a:r>
-              <a:rPr lang="en-US" smtClean="0"/>
+              <a:rPr lang="en-US"/>
               <a:t>Third level</a:t>
             </a:r>
           </a:p>
           <a:p>
             <a:pPr lvl="3"/>
             <a:r>
-              <a:rPr lang="en-US" smtClean="0"/>
+              <a:rPr lang="en-US"/>
               <a:t>Fourth level</a:t>
             </a:r>
           </a:p>
           <a:p>
             <a:pPr lvl="4"/>
             <a:r>
-              <a:rPr lang="en-US" smtClean="0"/>
+              <a:rPr lang="en-US"/>
               <a:t>Fifth level</a:t>
             </a:r>
-            <a:endParaRPr lang="en-US"/>
           </a:p>
         </p:txBody>
       </p:sp>
@@ -2720,7 +2715,7 @@
           <a:p>
             <a:fld id="{5BCAD085-E8A6-8845-BD4E-CB4CCA059FC4}" type="datetimeFigureOut">
               <a:rPr lang="en-US" smtClean="0"/>
-              <a:t>1/27/13</a:t>
+              <a:t>7/7/2026</a:t>
             </a:fld>
             <a:endParaRPr lang="en-US"/>
           </a:p>
@@ -3079,7 +3074,7 @@
 </file>
 
 <file path=ppt/slides/slide1.xml><?xml version="1.0" encoding="utf-8"?>
-<p:sld xmlns:a="http://schemas.openxmlformats.org/drawingml/2006/main" xmlns:p="http://schemas.openxmlformats.org/presentationml/2006/main" xmlns:r="http://schemas.openxmlformats.org/officeDocument/2006/relationships">
+<p:sld xmlns:a="http://schemas.openxmlformats.org/drawingml/2006/main" xmlns:r="http://schemas.openxmlformats.org/officeDocument/2006/relationships" xmlns:p="http://schemas.openxmlformats.org/presentationml/2006/main">
   <p:cSld>
     <p:spTree>
       <p:nvGrpSpPr>
@@ -3087,7 +3082,14 @@
         <p:cNvGrpSpPr/>
         <p:nvPr/>
       </p:nvGrpSpPr>
-      <p:grpSpPr/>
+      <p:grpSpPr>
+        <a:xfrm>
+          <a:off x="0" y="0"/>
+          <a:ext cx="0" cy="0"/>
+          <a:chOff x="0" y="0"/>
+          <a:chExt cx="0" cy="0"/>
+        </a:xfrm>
+      </p:grpSpPr>
       <p:sp>
         <p:nvSpPr>
           <p:cNvPr id="2" name="Rectangle 1"/>
@@ -3129,6 +3131,10 @@
           <a:lstStyle/>
           <a:p>
             <a:pPr algn="ctr"/>
+            <a:endParaRPr>
+              <a:latin typeface="Arial" panose="020B0604020202020204" pitchFamily="34" charset="0"/>
+              <a:cs typeface="Arial" panose="020B0604020202020204" pitchFamily="34" charset="0"/>
+            </a:endParaRPr>
           </a:p>
         </p:txBody>
       </p:sp>
@@ -3141,7 +3147,7 @@
         <p:spPr>
           <a:xfrm>
             <a:off x="320040" y="109728"/>
-            <a:ext cx="11521440" cy="548640"/>
+            <a:ext cx="11521440" cy="646331"/>
           </a:xfrm>
           <a:prstGeom prst="rect">
             <a:avLst/>
@@ -3154,17 +3160,18 @@
           </a:bodyPr>
           <a:lstStyle/>
           <a:p>
-            <a:pPr algn="l">
+            <a:pPr algn="ctr">
               <a:spcAft>
                 <a:spcPts val="400"/>
               </a:spcAft>
             </a:pPr>
             <a:r>
-              <a:rPr sz="3000" b="1">
+              <a:rPr sz="3600" b="1" dirty="0">
                 <a:solidFill>
                   <a:srgbClr val="FFFFFF"/>
                 </a:solidFill>
-                <a:latin typeface="Segoe UI"/>
+                <a:latin typeface="Arial" panose="020B0604020202020204" pitchFamily="34" charset="0"/>
+                <a:cs typeface="Arial" panose="020B0604020202020204" pitchFamily="34" charset="0"/>
               </a:rPr>
               <a:t>VANI — Voice Analysis &amp; Neural Intelligence</a:t>
             </a:r>
@@ -3180,7 +3187,7 @@
         <p:spPr>
           <a:xfrm>
             <a:off x="320040" y="676656"/>
-            <a:ext cx="11521440" cy="411480"/>
+            <a:ext cx="11521440" cy="369332"/>
           </a:xfrm>
           <a:prstGeom prst="rect">
             <a:avLst/>
@@ -3193,19 +3200,20 @@
           </a:bodyPr>
           <a:lstStyle/>
           <a:p>
-            <a:pPr algn="l">
+            <a:pPr algn="ctr">
               <a:spcAft>
                 <a:spcPts val="400"/>
               </a:spcAft>
             </a:pPr>
             <a:r>
-              <a:rPr sz="1300" b="0">
+              <a:rPr b="0" dirty="0">
                 <a:solidFill>
                   <a:srgbClr val="C7D8EA"/>
                 </a:solidFill>
-                <a:latin typeface="Segoe UI"/>
+                <a:latin typeface="Arial" panose="020B0604020202020204" pitchFamily="34" charset="0"/>
+                <a:cs typeface="Arial" panose="020B0604020202020204" pitchFamily="34" charset="0"/>
               </a:rPr>
-              <a:t>Offline AI-based Radio Intercept Analysis System   ·   M.Tech Research Project, IIT Indore   ·   Status as of 06 Jul 2026</a:t>
+              <a:t>Offline AI-based Radio Intercept Analysis System   </a:t>
             </a:r>
           </a:p>
         </p:txBody>
@@ -3251,6 +3259,10 @@
           <a:lstStyle/>
           <a:p>
             <a:pPr algn="ctr"/>
+            <a:endParaRPr>
+              <a:latin typeface="Arial" panose="020B0604020202020204" pitchFamily="34" charset="0"/>
+              <a:cs typeface="Arial" panose="020B0604020202020204" pitchFamily="34" charset="0"/>
+            </a:endParaRPr>
           </a:p>
         </p:txBody>
       </p:sp>
@@ -3262,8 +3274,8 @@
         </p:nvSpPr>
         <p:spPr>
           <a:xfrm>
-            <a:off x="384048" y="1453896"/>
-            <a:ext cx="5623559" cy="365760"/>
+            <a:off x="384048" y="1436721"/>
+            <a:ext cx="5623559" cy="400110"/>
           </a:xfrm>
           <a:prstGeom prst="rect">
             <a:avLst/>
@@ -3282,11 +3294,12 @@
               </a:spcAft>
             </a:pPr>
             <a:r>
-              <a:rPr sz="1500" b="1">
+              <a:rPr sz="2000" b="1" dirty="0">
                 <a:solidFill>
                   <a:srgbClr val="FFFFFF"/>
                 </a:solidFill>
-                <a:latin typeface="Segoe UI"/>
+                <a:latin typeface="Arial" panose="020B0604020202020204" pitchFamily="34" charset="0"/>
+                <a:cs typeface="Arial" panose="020B0604020202020204" pitchFamily="34" charset="0"/>
               </a:rPr>
               <a:t>DELIVERABLES</a:t>
             </a:r>
@@ -3334,6 +3347,10 @@
           <a:lstStyle/>
           <a:p>
             <a:pPr algn="ctr"/>
+            <a:endParaRPr>
+              <a:latin typeface="Arial" panose="020B0604020202020204" pitchFamily="34" charset="0"/>
+              <a:cs typeface="Arial" panose="020B0604020202020204" pitchFamily="34" charset="0"/>
+            </a:endParaRPr>
           </a:p>
         </p:txBody>
       </p:sp>
@@ -3345,8 +3362,8 @@
         </p:nvSpPr>
         <p:spPr>
           <a:xfrm>
-            <a:off x="457200" y="1947672"/>
-            <a:ext cx="5486400" cy="2788920"/>
+            <a:off x="457200" y="1870404"/>
+            <a:ext cx="5486400" cy="1746632"/>
           </a:xfrm>
           <a:prstGeom prst="rect">
             <a:avLst/>
@@ -3365,13 +3382,34 @@
               </a:spcAft>
             </a:pPr>
             <a:r>
-              <a:rPr sz="1300" b="0">
+              <a:rPr b="0" dirty="0">
                 <a:solidFill>
                   <a:srgbClr val="3A3A3A"/>
                 </a:solidFill>
-                <a:latin typeface="Segoe UI"/>
+                <a:latin typeface="Arial" panose="020B0604020202020204" pitchFamily="34" charset="0"/>
+                <a:cs typeface="Arial" panose="020B0604020202020204" pitchFamily="34" charset="0"/>
               </a:rPr>
-              <a:t>• Real-time multilingual ASR (fine-tuned Whisper)</a:t>
+              <a:t>• Real-time multilingual ASR (</a:t>
+            </a:r>
+            <a:r>
+              <a:rPr lang="en-US" dirty="0">
+                <a:solidFill>
+                  <a:srgbClr val="3A3A3A"/>
+                </a:solidFill>
+                <a:latin typeface="Arial" panose="020B0604020202020204" pitchFamily="34" charset="0"/>
+                <a:cs typeface="Arial" panose="020B0604020202020204" pitchFamily="34" charset="0"/>
+              </a:rPr>
+              <a:t>Automated speech recognition</a:t>
+            </a:r>
+            <a:r>
+              <a:rPr b="0" dirty="0">
+                <a:solidFill>
+                  <a:srgbClr val="3A3A3A"/>
+                </a:solidFill>
+                <a:latin typeface="Arial" panose="020B0604020202020204" pitchFamily="34" charset="0"/>
+                <a:cs typeface="Arial" panose="020B0604020202020204" pitchFamily="34" charset="0"/>
+              </a:rPr>
+              <a:t>)</a:t>
             </a:r>
           </a:p>
           <a:p>
@@ -3381,14 +3419,32 @@
               </a:spcAft>
             </a:pPr>
             <a:r>
-              <a:rPr sz="1300" b="0">
+              <a:rPr b="0" dirty="0">
                 <a:solidFill>
                   <a:srgbClr val="3A3A3A"/>
                 </a:solidFill>
-                <a:latin typeface="Segoe UI"/>
+                <a:latin typeface="Arial" panose="020B0604020202020204" pitchFamily="34" charset="0"/>
+                <a:cs typeface="Arial" panose="020B0604020202020204" pitchFamily="34" charset="0"/>
               </a:rPr>
-              <a:t>• Automatic language identification (MMS-LID, 256 langs)</a:t>
-            </a:r>
+              <a:t>• English translation</a:t>
+            </a:r>
+            <a:r>
+              <a:rPr lang="en-US" b="0" dirty="0">
+                <a:solidFill>
+                  <a:srgbClr val="3A3A3A"/>
+                </a:solidFill>
+                <a:latin typeface="Arial" panose="020B0604020202020204" pitchFamily="34" charset="0"/>
+                <a:cs typeface="Arial" panose="020B0604020202020204" pitchFamily="34" charset="0"/>
+              </a:rPr>
+              <a:t>.</a:t>
+            </a:r>
+            <a:endParaRPr b="0" dirty="0">
+              <a:solidFill>
+                <a:srgbClr val="3A3A3A"/>
+              </a:solidFill>
+              <a:latin typeface="Arial" panose="020B0604020202020204" pitchFamily="34" charset="0"/>
+              <a:cs typeface="Arial" panose="020B0604020202020204" pitchFamily="34" charset="0"/>
+            </a:endParaRPr>
           </a:p>
           <a:p>
             <a:pPr algn="l">
@@ -3397,14 +3453,52 @@
               </a:spcAft>
             </a:pPr>
             <a:r>
-              <a:rPr sz="1300" b="0">
+              <a:rPr b="0" dirty="0">
                 <a:solidFill>
                   <a:srgbClr val="3A3A3A"/>
                 </a:solidFill>
-                <a:latin typeface="Segoe UI"/>
+                <a:latin typeface="Arial" panose="020B0604020202020204" pitchFamily="34" charset="0"/>
+                <a:cs typeface="Arial" panose="020B0604020202020204" pitchFamily="34" charset="0"/>
               </a:rPr>
-              <a:t>• English translation (NLLB-200 / IndicTrans2)</a:t>
-            </a:r>
+              <a:t>• Sentiment analysis and </a:t>
+            </a:r>
+            <a:r>
+              <a:rPr lang="en-US" b="0" dirty="0">
+                <a:solidFill>
+                  <a:srgbClr val="3A3A3A"/>
+                </a:solidFill>
+                <a:latin typeface="Arial" panose="020B0604020202020204" pitchFamily="34" charset="0"/>
+                <a:cs typeface="Arial" panose="020B0604020202020204" pitchFamily="34" charset="0"/>
+              </a:rPr>
+              <a:t>R</a:t>
+            </a:r>
+            <a:r>
+              <a:rPr b="0" dirty="0">
+                <a:solidFill>
+                  <a:srgbClr val="3A3A3A"/>
+                </a:solidFill>
+                <a:latin typeface="Arial" panose="020B0604020202020204" pitchFamily="34" charset="0"/>
+                <a:cs typeface="Arial" panose="020B0604020202020204" pitchFamily="34" charset="0"/>
+              </a:rPr>
+              <a:t>eports</a:t>
+            </a:r>
+            <a:r>
+              <a:rPr lang="en-US" b="0" dirty="0">
+                <a:solidFill>
+                  <a:srgbClr val="3A3A3A"/>
+                </a:solidFill>
+                <a:latin typeface="Arial" panose="020B0604020202020204" pitchFamily="34" charset="0"/>
+                <a:cs typeface="Arial" panose="020B0604020202020204" pitchFamily="34" charset="0"/>
+              </a:rPr>
+              <a:t>.</a:t>
+            </a:r>
+            <a:endParaRPr b="0" dirty="0">
+              <a:solidFill>
+                <a:srgbClr val="3A3A3A"/>
+              </a:solidFill>
+              <a:latin typeface="Arial" panose="020B0604020202020204" pitchFamily="34" charset="0"/>
+              <a:cs typeface="Arial" panose="020B0604020202020204" pitchFamily="34" charset="0"/>
+            </a:endParaRPr>
           </a:p>
           <a:p>
             <a:pPr algn="l">
@@ -3413,62 +3507,32 @@
               </a:spcAft>
             </a:pPr>
             <a:r>
-              <a:rPr sz="1300" b="0">
+              <a:rPr b="0" dirty="0">
                 <a:solidFill>
                   <a:srgbClr val="3A3A3A"/>
                 </a:solidFill>
-                <a:latin typeface="Segoe UI"/>
+                <a:latin typeface="Arial" panose="020B0604020202020204" pitchFamily="34" charset="0"/>
+                <a:cs typeface="Arial" panose="020B0604020202020204" pitchFamily="34" charset="0"/>
               </a:rPr>
-              <a:t>• Keyword &amp; threat detection</a:t>
-            </a:r>
-          </a:p>
-          <a:p>
-            <a:pPr algn="l">
-              <a:spcAft>
-                <a:spcPts val="700"/>
-              </a:spcAft>
-            </a:pPr>
-            <a:r>
-              <a:rPr sz="1300" b="0">
+              <a:t>• Fully offline</a:t>
+            </a:r>
+            <a:r>
+              <a:rPr lang="en-US" dirty="0">
                 <a:solidFill>
                   <a:srgbClr val="3A3A3A"/>
                 </a:solidFill>
-                <a:latin typeface="Segoe UI"/>
+                <a:latin typeface="Arial" panose="020B0604020202020204" pitchFamily="34" charset="0"/>
+                <a:cs typeface="Arial" panose="020B0604020202020204" pitchFamily="34" charset="0"/>
               </a:rPr>
-              <a:t>• Structured Intelligence Summaries (ISUM, Gemma 3:12B)</a:t>
-            </a:r>
-          </a:p>
-          <a:p>
-            <a:pPr algn="l">
-              <a:spcAft>
-                <a:spcPts val="700"/>
-              </a:spcAft>
-            </a:pPr>
-            <a:r>
-              <a:rPr sz="1300" b="0">
-                <a:solidFill>
-                  <a:srgbClr val="3A3A3A"/>
-                </a:solidFill>
-                <a:latin typeface="Segoe UI"/>
-              </a:rPr>
-              <a:t>• Searchable transcript database + Streamlit UI</a:t>
-            </a:r>
-          </a:p>
-          <a:p>
-            <a:pPr algn="l">
-              <a:spcAft>
-                <a:spcPts val="700"/>
-              </a:spcAft>
-            </a:pPr>
-            <a:r>
-              <a:rPr sz="1300" b="0">
-                <a:solidFill>
-                  <a:srgbClr val="3A3A3A"/>
-                </a:solidFill>
-                <a:latin typeface="Segoe UI"/>
-              </a:rPr>
-              <a:t>• Fully offline — no internet after setup</a:t>
-            </a:r>
+              <a:t> implementation.</a:t>
+            </a:r>
+            <a:endParaRPr b="0" dirty="0">
+              <a:solidFill>
+                <a:srgbClr val="3A3A3A"/>
+              </a:solidFill>
+              <a:latin typeface="Arial" panose="020B0604020202020204" pitchFamily="34" charset="0"/>
+              <a:cs typeface="Arial" panose="020B0604020202020204" pitchFamily="34" charset="0"/>
+            </a:endParaRPr>
           </a:p>
         </p:txBody>
       </p:sp>
@@ -3513,6 +3577,10 @@
           <a:lstStyle/>
           <a:p>
             <a:pPr algn="ctr"/>
+            <a:endParaRPr>
+              <a:latin typeface="Arial" panose="020B0604020202020204" pitchFamily="34" charset="0"/>
+              <a:cs typeface="Arial" panose="020B0604020202020204" pitchFamily="34" charset="0"/>
+            </a:endParaRPr>
           </a:p>
         </p:txBody>
       </p:sp>
@@ -3524,8 +3592,8 @@
         </p:nvSpPr>
         <p:spPr>
           <a:xfrm>
-            <a:off x="6373368" y="1453896"/>
-            <a:ext cx="5623559" cy="365760"/>
+            <a:off x="6373368" y="1436721"/>
+            <a:ext cx="5623559" cy="400110"/>
           </a:xfrm>
           <a:prstGeom prst="rect">
             <a:avLst/>
@@ -3544,13 +3612,34 @@
               </a:spcAft>
             </a:pPr>
             <a:r>
-              <a:rPr sz="1500" b="1">
+              <a:rPr sz="2000" b="1" dirty="0">
                 <a:solidFill>
                   <a:srgbClr val="FFFFFF"/>
                 </a:solidFill>
-                <a:latin typeface="Segoe UI"/>
+                <a:latin typeface="Arial" panose="020B0604020202020204" pitchFamily="34" charset="0"/>
+                <a:cs typeface="Arial" panose="020B0604020202020204" pitchFamily="34" charset="0"/>
               </a:rPr>
-              <a:t>COMPLETED WORK</a:t>
+              <a:t>COMPLETED</a:t>
+            </a:r>
+            <a:r>
+              <a:rPr sz="1500" b="1" dirty="0">
+                <a:solidFill>
+                  <a:srgbClr val="FFFFFF"/>
+                </a:solidFill>
+                <a:latin typeface="Arial" panose="020B0604020202020204" pitchFamily="34" charset="0"/>
+                <a:cs typeface="Arial" panose="020B0604020202020204" pitchFamily="34" charset="0"/>
+              </a:rPr>
+              <a:t> </a:t>
+            </a:r>
+            <a:r>
+              <a:rPr sz="2000" b="1" dirty="0">
+                <a:solidFill>
+                  <a:srgbClr val="FFFFFF"/>
+                </a:solidFill>
+                <a:latin typeface="Arial" panose="020B0604020202020204" pitchFamily="34" charset="0"/>
+                <a:cs typeface="Arial" panose="020B0604020202020204" pitchFamily="34" charset="0"/>
+              </a:rPr>
+              <a:t>WORK</a:t>
             </a:r>
           </a:p>
         </p:txBody>
@@ -3596,6 +3685,10 @@
           <a:lstStyle/>
           <a:p>
             <a:pPr algn="ctr"/>
+            <a:endParaRPr>
+              <a:latin typeface="Arial" panose="020B0604020202020204" pitchFamily="34" charset="0"/>
+              <a:cs typeface="Arial" panose="020B0604020202020204" pitchFamily="34" charset="0"/>
+            </a:endParaRPr>
           </a:p>
         </p:txBody>
       </p:sp>
@@ -3607,8 +3700,8 @@
         </p:nvSpPr>
         <p:spPr>
           <a:xfrm>
-            <a:off x="6446520" y="1947672"/>
-            <a:ext cx="5486400" cy="2788920"/>
+            <a:off x="6446520" y="1883282"/>
+            <a:ext cx="5486400" cy="3400931"/>
           </a:xfrm>
           <a:prstGeom prst="rect">
             <a:avLst/>
@@ -3623,98 +3716,226 @@
           <a:p>
             <a:pPr algn="l">
               <a:spcAft>
-                <a:spcPts val="700"/>
+                <a:spcPts val="600"/>
               </a:spcAft>
             </a:pPr>
             <a:r>
-              <a:rPr sz="1300" b="0">
+              <a:rPr b="0" dirty="0">
                 <a:solidFill>
                   <a:srgbClr val="3A3A3A"/>
                 </a:solidFill>
-                <a:latin typeface="Segoe UI"/>
+                <a:latin typeface="Arial" panose="020B0604020202020204" pitchFamily="34" charset="0"/>
+                <a:cs typeface="Arial" panose="020B0604020202020204" pitchFamily="34" charset="0"/>
               </a:rPr>
-              <a:t>✓ 7 languages fine-tuned via LoRA (pa, ps, ur, ne, zh, hi, ks)</a:t>
-            </a:r>
-          </a:p>
-          <a:p>
-            <a:pPr algn="l">
+              <a:t>✓ Fine-tuned ASR WER  (baseline → achieved):</a:t>
+            </a:r>
+          </a:p>
+          <a:p>
+            <a:pPr>
               <a:spcAft>
-                <a:spcPts val="700"/>
+                <a:spcPts val="600"/>
               </a:spcAft>
             </a:pPr>
             <a:r>
-              <a:rPr sz="1300" b="0">
+              <a:rPr b="0" dirty="0">
                 <a:solidFill>
                   <a:srgbClr val="3A3A3A"/>
                 </a:solidFill>
-                <a:latin typeface="Segoe UI"/>
+                <a:latin typeface="Arial" panose="020B0604020202020204" pitchFamily="34" charset="0"/>
+                <a:cs typeface="Arial" panose="020B0604020202020204" pitchFamily="34" charset="0"/>
               </a:rPr>
-              <a:t>✓ Full 10-stage pipeline verified end-to-end (06 Jul)</a:t>
-            </a:r>
-          </a:p>
-          <a:p>
-            <a:pPr algn="l">
+              <a:t>hi 30.3→19.8</a:t>
+            </a:r>
+            <a:r>
+              <a:rPr lang="en-US" b="0" dirty="0">
+                <a:solidFill>
+                  <a:srgbClr val="3A3A3A"/>
+                </a:solidFill>
+                <a:latin typeface="Arial" panose="020B0604020202020204" pitchFamily="34" charset="0"/>
+                <a:cs typeface="Arial" panose="020B0604020202020204" pitchFamily="34" charset="0"/>
+              </a:rPr>
+              <a:t>,    </a:t>
+            </a:r>
+            <a:r>
+              <a:rPr lang="en-US" b="0" dirty="0" err="1">
+                <a:solidFill>
+                  <a:srgbClr val="3A3A3A"/>
+                </a:solidFill>
+                <a:latin typeface="Arial" panose="020B0604020202020204" pitchFamily="34" charset="0"/>
+                <a:cs typeface="Arial" panose="020B0604020202020204" pitchFamily="34" charset="0"/>
+              </a:rPr>
+              <a:t>ur</a:t>
+            </a:r>
+            <a:r>
+              <a:rPr lang="en-US" b="0" dirty="0">
+                <a:solidFill>
+                  <a:srgbClr val="3A3A3A"/>
+                </a:solidFill>
+                <a:latin typeface="Arial" panose="020B0604020202020204" pitchFamily="34" charset="0"/>
+                <a:cs typeface="Arial" panose="020B0604020202020204" pitchFamily="34" charset="0"/>
+              </a:rPr>
+              <a:t> 24.4→19.8,    </a:t>
+            </a:r>
+            <a:r>
+              <a:rPr lang="en-US" b="0" dirty="0" err="1">
+                <a:solidFill>
+                  <a:srgbClr val="3A3A3A"/>
+                </a:solidFill>
+                <a:latin typeface="Arial" panose="020B0604020202020204" pitchFamily="34" charset="0"/>
+                <a:cs typeface="Arial" panose="020B0604020202020204" pitchFamily="34" charset="0"/>
+              </a:rPr>
+              <a:t>zh</a:t>
+            </a:r>
+            <a:r>
+              <a:rPr lang="en-US" b="0" dirty="0">
+                <a:solidFill>
+                  <a:srgbClr val="3A3A3A"/>
+                </a:solidFill>
+                <a:latin typeface="Arial" panose="020B0604020202020204" pitchFamily="34" charset="0"/>
+                <a:cs typeface="Arial" panose="020B0604020202020204" pitchFamily="34" charset="0"/>
+              </a:rPr>
+              <a:t> 100.0→16.0,</a:t>
+            </a:r>
+          </a:p>
+          <a:p>
+            <a:pPr>
               <a:spcAft>
-                <a:spcPts val="700"/>
+                <a:spcPts val="600"/>
               </a:spcAft>
             </a:pPr>
             <a:r>
-              <a:rPr sz="1300" b="0">
+              <a:rPr lang="en-US" b="0" dirty="0">
                 <a:solidFill>
                   <a:srgbClr val="3A3A3A"/>
                 </a:solidFill>
-                <a:latin typeface="Segoe UI"/>
+                <a:latin typeface="Arial" panose="020B0604020202020204" pitchFamily="34" charset="0"/>
+                <a:cs typeface="Arial" panose="020B0604020202020204" pitchFamily="34" charset="0"/>
               </a:rPr>
-              <a:t>✓ Cross-model eval: Whisper vs SeamlessM4T (7 langs)</a:t>
-            </a:r>
-          </a:p>
-          <a:p>
-            <a:pPr algn="l">
+              <a:t>pa 105.8→55.7,   ne 94.6→49.2,    </a:t>
+            </a:r>
+            <a:r>
+              <a:rPr lang="en-US" b="0" dirty="0" err="1">
+                <a:solidFill>
+                  <a:srgbClr val="3A3A3A"/>
+                </a:solidFill>
+                <a:latin typeface="Arial" panose="020B0604020202020204" pitchFamily="34" charset="0"/>
+                <a:cs typeface="Arial" panose="020B0604020202020204" pitchFamily="34" charset="0"/>
+              </a:rPr>
+              <a:t>ps</a:t>
+            </a:r>
+            <a:r>
+              <a:rPr lang="en-US" b="0" dirty="0">
+                <a:solidFill>
+                  <a:srgbClr val="3A3A3A"/>
+                </a:solidFill>
+                <a:latin typeface="Arial" panose="020B0604020202020204" pitchFamily="34" charset="0"/>
+                <a:cs typeface="Arial" panose="020B0604020202020204" pitchFamily="34" charset="0"/>
+              </a:rPr>
+              <a:t>  94.2→38.6</a:t>
+            </a:r>
+          </a:p>
+          <a:p>
+            <a:pPr>
               <a:spcAft>
-                <a:spcPts val="700"/>
+                <a:spcPts val="600"/>
               </a:spcAft>
             </a:pPr>
             <a:r>
-              <a:rPr sz="1300" b="0">
+              <a:rPr lang="en-US" b="0" dirty="0">
                 <a:solidFill>
                   <a:srgbClr val="3A3A3A"/>
                 </a:solidFill>
-                <a:latin typeface="Segoe UI"/>
+                <a:latin typeface="Arial" panose="020B0604020202020204" pitchFamily="34" charset="0"/>
+                <a:cs typeface="Arial" panose="020B0604020202020204" pitchFamily="34" charset="0"/>
               </a:rPr>
-              <a:t>✓ Robustness eval: 7 langs × 5 noise/distortion conditions</a:t>
-            </a:r>
-          </a:p>
-          <a:p>
-            <a:pPr algn="l">
+              <a:t>✓ 7 languages </a:t>
+            </a:r>
+            <a:r>
+              <a:rPr lang="en-US" b="0" dirty="0" err="1">
+                <a:solidFill>
+                  <a:srgbClr val="3A3A3A"/>
+                </a:solidFill>
+                <a:latin typeface="Arial" panose="020B0604020202020204" pitchFamily="34" charset="0"/>
+                <a:cs typeface="Arial" panose="020B0604020202020204" pitchFamily="34" charset="0"/>
+              </a:rPr>
+              <a:t>LoRA</a:t>
+            </a:r>
+            <a:r>
+              <a:rPr lang="en-US" b="0" dirty="0">
+                <a:solidFill>
+                  <a:srgbClr val="3A3A3A"/>
+                </a:solidFill>
+                <a:latin typeface="Arial" panose="020B0604020202020204" pitchFamily="34" charset="0"/>
+                <a:cs typeface="Arial" panose="020B0604020202020204" pitchFamily="34" charset="0"/>
+              </a:rPr>
+              <a:t> fine-tuned; 10-stage pipeline verified</a:t>
+            </a:r>
+          </a:p>
+          <a:p>
+            <a:pPr>
               <a:spcAft>
-                <a:spcPts val="700"/>
+                <a:spcPts val="600"/>
               </a:spcAft>
             </a:pPr>
             <a:r>
-              <a:rPr sz="1300" b="0">
+              <a:rPr b="0" dirty="0">
                 <a:solidFill>
                   <a:srgbClr val="3A3A3A"/>
                 </a:solidFill>
-                <a:latin typeface="Segoe UI"/>
+                <a:latin typeface="Arial" panose="020B0604020202020204" pitchFamily="34" charset="0"/>
+                <a:cs typeface="Arial" panose="020B0604020202020204" pitchFamily="34" charset="0"/>
               </a:rPr>
-              <a:t>✓ Reports generated (PDF + PPTX)</a:t>
-            </a:r>
-          </a:p>
-          <a:p>
-            <a:pPr algn="l">
+              <a:t>✓ Cross-model (vs SeamlessM4T) + robustness eval (7×5)</a:t>
+            </a:r>
+            <a:endParaRPr lang="en-US" b="0" dirty="0">
+              <a:solidFill>
+                <a:srgbClr val="3A3A3A"/>
+              </a:solidFill>
+              <a:latin typeface="Arial" panose="020B0604020202020204" pitchFamily="34" charset="0"/>
+              <a:cs typeface="Arial" panose="020B0604020202020204" pitchFamily="34" charset="0"/>
+            </a:endParaRPr>
+          </a:p>
+          <a:p>
+            <a:pPr>
               <a:spcAft>
-                <a:spcPts val="700"/>
+                <a:spcPts val="600"/>
               </a:spcAft>
             </a:pPr>
-            <a:r>
-              <a:rPr sz="1300" b="0">
-                <a:solidFill>
-                  <a:srgbClr val="3A3A3A"/>
-                </a:solidFill>
-                <a:latin typeface="Segoe UI"/>
-              </a:rPr>
-              <a:t>✓ Infra upgrade: 2 TB SSD + 32 GB RAM; data moved to SN7100</a:t>
-            </a:r>
+            <a:endParaRPr lang="en-US" b="0" dirty="0">
+              <a:solidFill>
+                <a:srgbClr val="3A3A3A"/>
+              </a:solidFill>
+              <a:latin typeface="Arial" panose="020B0604020202020204" pitchFamily="34" charset="0"/>
+              <a:cs typeface="Arial" panose="020B0604020202020204" pitchFamily="34" charset="0"/>
+            </a:endParaRPr>
+          </a:p>
+          <a:p>
+            <a:pPr>
+              <a:spcAft>
+                <a:spcPts val="600"/>
+              </a:spcAft>
+            </a:pPr>
+            <a:endParaRPr lang="en-US" b="0" dirty="0">
+              <a:solidFill>
+                <a:srgbClr val="3A3A3A"/>
+              </a:solidFill>
+              <a:latin typeface="Arial" panose="020B0604020202020204" pitchFamily="34" charset="0"/>
+              <a:cs typeface="Arial" panose="020B0604020202020204" pitchFamily="34" charset="0"/>
+            </a:endParaRPr>
+          </a:p>
+          <a:p>
+            <a:pPr>
+              <a:spcAft>
+                <a:spcPts val="600"/>
+              </a:spcAft>
+            </a:pPr>
+            <a:endParaRPr b="0" dirty="0">
+              <a:solidFill>
+                <a:srgbClr val="3A3A3A"/>
+              </a:solidFill>
+              <a:latin typeface="Arial" panose="020B0604020202020204" pitchFamily="34" charset="0"/>
+              <a:cs typeface="Arial" panose="020B0604020202020204" pitchFamily="34" charset="0"/>
+            </a:endParaRPr>
           </a:p>
         </p:txBody>
       </p:sp>
@@ -3759,6 +3980,10 @@
           <a:lstStyle/>
           <a:p>
             <a:pPr algn="ctr"/>
+            <a:endParaRPr>
+              <a:latin typeface="Arial" panose="020B0604020202020204" pitchFamily="34" charset="0"/>
+              <a:cs typeface="Arial" panose="020B0604020202020204" pitchFamily="34" charset="0"/>
+            </a:endParaRPr>
           </a:p>
         </p:txBody>
       </p:sp>
@@ -3770,8 +3995,8 @@
         </p:nvSpPr>
         <p:spPr>
           <a:xfrm>
-            <a:off x="384048" y="4882896"/>
-            <a:ext cx="11457432" cy="365760"/>
+            <a:off x="384048" y="4865721"/>
+            <a:ext cx="11457432" cy="400110"/>
           </a:xfrm>
           <a:prstGeom prst="rect">
             <a:avLst/>
@@ -3790,11 +4015,12 @@
               </a:spcAft>
             </a:pPr>
             <a:r>
-              <a:rPr sz="1500" b="1">
+              <a:rPr sz="2000" b="1" dirty="0">
                 <a:solidFill>
                   <a:srgbClr val="FFFFFF"/>
                 </a:solidFill>
-                <a:latin typeface="Segoe UI"/>
+                <a:latin typeface="Arial" panose="020B0604020202020204" pitchFamily="34" charset="0"/>
+                <a:cs typeface="Arial" panose="020B0604020202020204" pitchFamily="34" charset="0"/>
               </a:rPr>
               <a:t>PENDING WORK  —  TIMELINE</a:t>
             </a:r>
@@ -3842,6 +4068,10 @@
           <a:lstStyle/>
           <a:p>
             <a:pPr algn="ctr"/>
+            <a:endParaRPr>
+              <a:latin typeface="Arial" panose="020B0604020202020204" pitchFamily="34" charset="0"/>
+              <a:cs typeface="Arial" panose="020B0604020202020204" pitchFamily="34" charset="0"/>
+            </a:endParaRPr>
           </a:p>
         </p:txBody>
       </p:sp>
@@ -3854,7 +4084,7 @@
         <p:spPr>
           <a:xfrm>
             <a:off x="457200" y="5358383"/>
-            <a:ext cx="11338560" cy="1188720"/>
+            <a:ext cx="11338560" cy="748923"/>
           </a:xfrm>
           <a:prstGeom prst="rect">
             <a:avLst/>
@@ -3873,14 +4103,52 @@
               </a:spcAft>
             </a:pPr>
             <a:r>
-              <a:rPr sz="1300" b="0">
+              <a:rPr b="0" dirty="0">
                 <a:solidFill>
                   <a:srgbClr val="3A3A3A"/>
                 </a:solidFill>
-                <a:latin typeface="Segoe UI"/>
+                <a:latin typeface="Arial" panose="020B0604020202020204" pitchFamily="34" charset="0"/>
+                <a:cs typeface="Arial" panose="020B0604020202020204" pitchFamily="34" charset="0"/>
               </a:rPr>
-              <a:t>06 Jul 2026   →  Verify G: backup of E: model dirs (in progress)</a:t>
-            </a:r>
+              <a:t>ASR improvement  →  Reduce WER for languages still above acceptable (~</a:t>
+            </a:r>
+            <a:r>
+              <a:rPr lang="en-US" b="0" dirty="0">
+                <a:solidFill>
+                  <a:srgbClr val="3A3A3A"/>
+                </a:solidFill>
+                <a:latin typeface="Arial" panose="020B0604020202020204" pitchFamily="34" charset="0"/>
+                <a:cs typeface="Arial" panose="020B0604020202020204" pitchFamily="34" charset="0"/>
+              </a:rPr>
+              <a:t>3</a:t>
+            </a:r>
+            <a:r>
+              <a:rPr lang="en-US" dirty="0">
+                <a:solidFill>
+                  <a:srgbClr val="3A3A3A"/>
+                </a:solidFill>
+                <a:latin typeface="Arial" panose="020B0604020202020204" pitchFamily="34" charset="0"/>
+                <a:cs typeface="Arial" panose="020B0604020202020204" pitchFamily="34" charset="0"/>
+              </a:rPr>
+              <a:t>0</a:t>
+            </a:r>
+            <a:r>
+              <a:rPr b="0" dirty="0">
+                <a:solidFill>
+                  <a:srgbClr val="3A3A3A"/>
+                </a:solidFill>
+                <a:latin typeface="Arial" panose="020B0604020202020204" pitchFamily="34" charset="0"/>
+                <a:cs typeface="Arial" panose="020B0604020202020204" pitchFamily="34" charset="0"/>
+              </a:rPr>
+              <a:t>%):</a:t>
+            </a:r>
+            <a:endParaRPr lang="en-US" b="0" dirty="0">
+              <a:solidFill>
+                <a:srgbClr val="3A3A3A"/>
+              </a:solidFill>
+              <a:latin typeface="Arial" panose="020B0604020202020204" pitchFamily="34" charset="0"/>
+              <a:cs typeface="Arial" panose="020B0604020202020204" pitchFamily="34" charset="0"/>
+            </a:endParaRPr>
           </a:p>
           <a:p>
             <a:pPr algn="l">
@@ -3889,45 +4157,14 @@
               </a:spcAft>
             </a:pPr>
             <a:r>
-              <a:rPr sz="1300" b="0">
+              <a:rPr b="0" dirty="0">
                 <a:solidFill>
                   <a:srgbClr val="3A3A3A"/>
                 </a:solidFill>
-                <a:latin typeface="Segoe UI"/>
+                <a:latin typeface="Arial" panose="020B0604020202020204" pitchFamily="34" charset="0"/>
+                <a:cs typeface="Arial" panose="020B0604020202020204" pitchFamily="34" charset="0"/>
               </a:rPr>
-              <a:t>08 Jul 2026   →  PROJECT DEMO — full pipeline via Streamlit UI</a:t>
-            </a:r>
-          </a:p>
-          <a:p>
-            <a:pPr algn="l">
-              <a:spcAft>
-                <a:spcPts val="800"/>
-              </a:spcAft>
-            </a:pPr>
-            <a:r>
-              <a:rPr sz="1300" b="0">
-                <a:solidFill>
-                  <a:srgbClr val="3A3A3A"/>
-                </a:solidFill>
-                <a:latin typeface="Segoe UI"/>
-              </a:rPr>
-              <a:t>Post-demo     →  Detailed parameter/method explainer (LoRA, CT2, eval metrics)</a:t>
-            </a:r>
-          </a:p>
-          <a:p>
-            <a:pPr algn="l">
-              <a:spcAft>
-                <a:spcPts val="800"/>
-              </a:spcAft>
-            </a:pPr>
-            <a:r>
-              <a:rPr sz="1300" b="0">
-                <a:solidFill>
-                  <a:srgbClr val="3A3A3A"/>
-                </a:solidFill>
-                <a:latin typeface="Segoe UI"/>
-              </a:rPr>
-              <a:t>Backlog       →  Kashmiri WER not meaningful; SeamlessM4T S2TT (ASR-only LoRA) to revisit</a:t>
+              <a:t>Punjabi 55.7%,   Nepali 49.2%,   Pashto 38.6%</a:t>
             </a:r>
           </a:p>
         </p:txBody>
